--- a/curso_es/pptx/S08.pptx
+++ b/curso_es/pptx/S08.pptx
@@ -4146,7 +4146,7 @@
                 </a:solidFill>
                 <a:latin typeface="Nunito Sans"/>
               </a:rPr>
-              <a:t>«Iker no puede ser el portero: lleva gafas.»</a:t>
+              <a:t>«Un chico no puede ser el portero: lleva gafas.»</a:t>
             </a:r>
           </a:p>
         </p:txBody>
@@ -4194,7 +4194,7 @@
                 </a:solidFill>
                 <a:latin typeface="Nunito Sans"/>
               </a:rPr>
-              <a:t>C: Iker no puede ser el portero. P1: Iker lleva gafas.</a:t>
+              <a:t>C: el chico no puede ser el portero. P1: el chico lleva gafas.</a:t>
             </a:r>
           </a:p>
           <a:p>
@@ -5350,7 +5350,7 @@
                 </a:solidFill>
                 <a:latin typeface="Nunito Sans"/>
               </a:rPr>
-              <a:t>«Kevin no puede llevar la moto de su tío: tiene 13 años.»</a:t>
+              <a:t>«Un chico no puede llevar la moto de su tío: tiene 13 años.»</a:t>
             </a:r>
           </a:p>
         </p:txBody>
@@ -7076,7 +7076,7 @@
                 </a:solidFill>
                 <a:latin typeface="Nunito Sans"/>
               </a:rPr>
-              <a:t>«Iker no puede ser el portero: lleva gafas.»</a:t>
+              <a:t>«Un chico no puede ser el portero: lleva gafas.»</a:t>
             </a:r>
           </a:p>
         </p:txBody>
